--- a/docs/minions-cafe-presentation.pptx
+++ b/docs/minions-cafe-presentation.pptx
@@ -4340,7 +4340,7 @@
               </a:defRPr>
             </a:pPr>
             <a:r>
-              <a:t>5. 67160292 นางสาวชนิดาภา ชาภักดี  (QA &amp; Usability)   |  สไลด์ 5 (Demo) &amp; 6</a:t>
+              <a:t>5. 67160392 นางสาวชนิดาภา ชาภักดี  (QA &amp; Usability)   |  สไลด์ 5 (Demo) &amp; 6</a:t>
             </a:r>
           </a:p>
         </p:txBody>
